--- a/Sem-2/Python/Python Provided/PPTs/tkinter.pptx
+++ b/Sem-2/Python/Python Provided/PPTs/tkinter.pptx
@@ -8,8 +8,9 @@
     <p:sldId id="256" r:id="rId2"/>
     <p:sldId id="257" r:id="rId3"/>
     <p:sldId id="258" r:id="rId4"/>
-    <p:sldId id="259" r:id="rId5"/>
-    <p:sldId id="260" r:id="rId6"/>
+    <p:sldId id="261" r:id="rId5"/>
+    <p:sldId id="259" r:id="rId6"/>
+    <p:sldId id="260" r:id="rId7"/>
   </p:sldIdLst>
   <p:sldSz cx="12192000" cy="6858000"/>
   <p:notesSz cx="6858000" cy="9144000"/>
@@ -108,6 +109,11 @@
       </a:defRPr>
     </a:lvl9pPr>
   </p:defaultTextStyle>
+  <p:extLst>
+    <p:ext uri="{EFAFB233-063F-42B5-8137-9DF3F51BA10A}">
+      <p15:sldGuideLst xmlns:p15="http://schemas.microsoft.com/office/powerpoint/2012/main"/>
+    </p:ext>
+  </p:extLst>
 </p:presentation>
 </file>
 
@@ -133,7 +139,7 @@
           <p:cNvPr id="2" name="Title 1">
             <a:extLst>
               <a:ext uri="{FF2B5EF4-FFF2-40B4-BE49-F238E27FC236}">
-                <a16:creationId xmlns:a16="http://schemas.microsoft.com/office/drawing/2014/main" id="{8A99C718-8734-3B1C-6B18-03803DC541E4}"/>
+                <a16:creationId xmlns:a16="http://schemas.microsoft.com/office/drawing/2014/main" xmlns="" id="{8A99C718-8734-3B1C-6B18-03803DC541E4}"/>
               </a:ext>
             </a:extLst>
           </p:cNvPr>
@@ -171,7 +177,7 @@
           <p:cNvPr id="3" name="Subtitle 2">
             <a:extLst>
               <a:ext uri="{FF2B5EF4-FFF2-40B4-BE49-F238E27FC236}">
-                <a16:creationId xmlns:a16="http://schemas.microsoft.com/office/drawing/2014/main" id="{776EE00B-36E9-576B-5382-98EFD8EB567E}"/>
+                <a16:creationId xmlns:a16="http://schemas.microsoft.com/office/drawing/2014/main" xmlns="" id="{776EE00B-36E9-576B-5382-98EFD8EB567E}"/>
               </a:ext>
             </a:extLst>
           </p:cNvPr>
@@ -242,7 +248,7 @@
           <p:cNvPr id="4" name="Date Placeholder 3">
             <a:extLst>
               <a:ext uri="{FF2B5EF4-FFF2-40B4-BE49-F238E27FC236}">
-                <a16:creationId xmlns:a16="http://schemas.microsoft.com/office/drawing/2014/main" id="{C78774EF-52C0-6563-1AE5-8F11B6AC5C3E}"/>
+                <a16:creationId xmlns:a16="http://schemas.microsoft.com/office/drawing/2014/main" xmlns="" id="{C78774EF-52C0-6563-1AE5-8F11B6AC5C3E}"/>
               </a:ext>
             </a:extLst>
           </p:cNvPr>
@@ -260,7 +266,7 @@
           <a:p>
             <a:fld id="{C1B26918-AFA0-4981-BA75-A361DECE8A45}" type="datetimeFigureOut">
               <a:rPr lang="en-IN" smtClean="0"/>
-              <a:t>07-02-2024</a:t>
+              <a:t>23-03-2026</a:t>
             </a:fld>
             <a:endParaRPr lang="en-IN"/>
           </a:p>
@@ -271,7 +277,7 @@
           <p:cNvPr id="5" name="Footer Placeholder 4">
             <a:extLst>
               <a:ext uri="{FF2B5EF4-FFF2-40B4-BE49-F238E27FC236}">
-                <a16:creationId xmlns:a16="http://schemas.microsoft.com/office/drawing/2014/main" id="{2B653229-AC14-F284-3D02-9ABA6ADEC5F1}"/>
+                <a16:creationId xmlns:a16="http://schemas.microsoft.com/office/drawing/2014/main" xmlns="" id="{2B653229-AC14-F284-3D02-9ABA6ADEC5F1}"/>
               </a:ext>
             </a:extLst>
           </p:cNvPr>
@@ -296,7 +302,7 @@
           <p:cNvPr id="6" name="Slide Number Placeholder 5">
             <a:extLst>
               <a:ext uri="{FF2B5EF4-FFF2-40B4-BE49-F238E27FC236}">
-                <a16:creationId xmlns:a16="http://schemas.microsoft.com/office/drawing/2014/main" id="{561477F0-CF5D-056F-E15B-D5C6C1FA9F5B}"/>
+                <a16:creationId xmlns:a16="http://schemas.microsoft.com/office/drawing/2014/main" xmlns="" id="{561477F0-CF5D-056F-E15B-D5C6C1FA9F5B}"/>
               </a:ext>
             </a:extLst>
           </p:cNvPr>
@@ -355,7 +361,7 @@
           <p:cNvPr id="2" name="Title 1">
             <a:extLst>
               <a:ext uri="{FF2B5EF4-FFF2-40B4-BE49-F238E27FC236}">
-                <a16:creationId xmlns:a16="http://schemas.microsoft.com/office/drawing/2014/main" id="{65CD6648-332E-4D68-32D1-8A3E2BB2923F}"/>
+                <a16:creationId xmlns:a16="http://schemas.microsoft.com/office/drawing/2014/main" xmlns="" id="{65CD6648-332E-4D68-32D1-8A3E2BB2923F}"/>
               </a:ext>
             </a:extLst>
           </p:cNvPr>
@@ -384,7 +390,7 @@
           <p:cNvPr id="3" name="Vertical Text Placeholder 2">
             <a:extLst>
               <a:ext uri="{FF2B5EF4-FFF2-40B4-BE49-F238E27FC236}">
-                <a16:creationId xmlns:a16="http://schemas.microsoft.com/office/drawing/2014/main" id="{BDF9C7A4-3009-3392-1F2A-CDACD0B395D8}"/>
+                <a16:creationId xmlns:a16="http://schemas.microsoft.com/office/drawing/2014/main" xmlns="" id="{BDF9C7A4-3009-3392-1F2A-CDACD0B395D8}"/>
               </a:ext>
             </a:extLst>
           </p:cNvPr>
@@ -442,7 +448,7 @@
           <p:cNvPr id="4" name="Date Placeholder 3">
             <a:extLst>
               <a:ext uri="{FF2B5EF4-FFF2-40B4-BE49-F238E27FC236}">
-                <a16:creationId xmlns:a16="http://schemas.microsoft.com/office/drawing/2014/main" id="{D770142F-117F-F1A9-9F2D-5B2DCB639A7F}"/>
+                <a16:creationId xmlns:a16="http://schemas.microsoft.com/office/drawing/2014/main" xmlns="" id="{D770142F-117F-F1A9-9F2D-5B2DCB639A7F}"/>
               </a:ext>
             </a:extLst>
           </p:cNvPr>
@@ -460,7 +466,7 @@
           <a:p>
             <a:fld id="{C1B26918-AFA0-4981-BA75-A361DECE8A45}" type="datetimeFigureOut">
               <a:rPr lang="en-IN" smtClean="0"/>
-              <a:t>07-02-2024</a:t>
+              <a:t>23-03-2026</a:t>
             </a:fld>
             <a:endParaRPr lang="en-IN"/>
           </a:p>
@@ -471,7 +477,7 @@
           <p:cNvPr id="5" name="Footer Placeholder 4">
             <a:extLst>
               <a:ext uri="{FF2B5EF4-FFF2-40B4-BE49-F238E27FC236}">
-                <a16:creationId xmlns:a16="http://schemas.microsoft.com/office/drawing/2014/main" id="{3BEEC085-7A10-97AD-BB61-4E653085051C}"/>
+                <a16:creationId xmlns:a16="http://schemas.microsoft.com/office/drawing/2014/main" xmlns="" id="{3BEEC085-7A10-97AD-BB61-4E653085051C}"/>
               </a:ext>
             </a:extLst>
           </p:cNvPr>
@@ -496,7 +502,7 @@
           <p:cNvPr id="6" name="Slide Number Placeholder 5">
             <a:extLst>
               <a:ext uri="{FF2B5EF4-FFF2-40B4-BE49-F238E27FC236}">
-                <a16:creationId xmlns:a16="http://schemas.microsoft.com/office/drawing/2014/main" id="{DDA9B854-5A54-A06A-8012-FB87C9DC82A1}"/>
+                <a16:creationId xmlns:a16="http://schemas.microsoft.com/office/drawing/2014/main" xmlns="" id="{DDA9B854-5A54-A06A-8012-FB87C9DC82A1}"/>
               </a:ext>
             </a:extLst>
           </p:cNvPr>
@@ -555,7 +561,7 @@
           <p:cNvPr id="2" name="Vertical Title 1">
             <a:extLst>
               <a:ext uri="{FF2B5EF4-FFF2-40B4-BE49-F238E27FC236}">
-                <a16:creationId xmlns:a16="http://schemas.microsoft.com/office/drawing/2014/main" id="{718EC0FE-49D2-32CC-EF7A-A0BE822AB9C2}"/>
+                <a16:creationId xmlns:a16="http://schemas.microsoft.com/office/drawing/2014/main" xmlns="" id="{718EC0FE-49D2-32CC-EF7A-A0BE822AB9C2}"/>
               </a:ext>
             </a:extLst>
           </p:cNvPr>
@@ -589,7 +595,7 @@
           <p:cNvPr id="3" name="Vertical Text Placeholder 2">
             <a:extLst>
               <a:ext uri="{FF2B5EF4-FFF2-40B4-BE49-F238E27FC236}">
-                <a16:creationId xmlns:a16="http://schemas.microsoft.com/office/drawing/2014/main" id="{601DD60C-620F-A89D-5C61-F715BB1783CA}"/>
+                <a16:creationId xmlns:a16="http://schemas.microsoft.com/office/drawing/2014/main" xmlns="" id="{601DD60C-620F-A89D-5C61-F715BB1783CA}"/>
               </a:ext>
             </a:extLst>
           </p:cNvPr>
@@ -652,7 +658,7 @@
           <p:cNvPr id="4" name="Date Placeholder 3">
             <a:extLst>
               <a:ext uri="{FF2B5EF4-FFF2-40B4-BE49-F238E27FC236}">
-                <a16:creationId xmlns:a16="http://schemas.microsoft.com/office/drawing/2014/main" id="{CB60EB8C-827E-06A0-AB75-67E3E2AB4D92}"/>
+                <a16:creationId xmlns:a16="http://schemas.microsoft.com/office/drawing/2014/main" xmlns="" id="{CB60EB8C-827E-06A0-AB75-67E3E2AB4D92}"/>
               </a:ext>
             </a:extLst>
           </p:cNvPr>
@@ -670,7 +676,7 @@
           <a:p>
             <a:fld id="{C1B26918-AFA0-4981-BA75-A361DECE8A45}" type="datetimeFigureOut">
               <a:rPr lang="en-IN" smtClean="0"/>
-              <a:t>07-02-2024</a:t>
+              <a:t>23-03-2026</a:t>
             </a:fld>
             <a:endParaRPr lang="en-IN"/>
           </a:p>
@@ -681,7 +687,7 @@
           <p:cNvPr id="5" name="Footer Placeholder 4">
             <a:extLst>
               <a:ext uri="{FF2B5EF4-FFF2-40B4-BE49-F238E27FC236}">
-                <a16:creationId xmlns:a16="http://schemas.microsoft.com/office/drawing/2014/main" id="{8509DD6E-93D4-365C-32C4-AE3ED56CD9E4}"/>
+                <a16:creationId xmlns:a16="http://schemas.microsoft.com/office/drawing/2014/main" xmlns="" id="{8509DD6E-93D4-365C-32C4-AE3ED56CD9E4}"/>
               </a:ext>
             </a:extLst>
           </p:cNvPr>
@@ -706,7 +712,7 @@
           <p:cNvPr id="6" name="Slide Number Placeholder 5">
             <a:extLst>
               <a:ext uri="{FF2B5EF4-FFF2-40B4-BE49-F238E27FC236}">
-                <a16:creationId xmlns:a16="http://schemas.microsoft.com/office/drawing/2014/main" id="{E6D5EC3D-C291-773A-4890-631F994AAC13}"/>
+                <a16:creationId xmlns:a16="http://schemas.microsoft.com/office/drawing/2014/main" xmlns="" id="{E6D5EC3D-C291-773A-4890-631F994AAC13}"/>
               </a:ext>
             </a:extLst>
           </p:cNvPr>
@@ -765,7 +771,7 @@
           <p:cNvPr id="2" name="Title 1">
             <a:extLst>
               <a:ext uri="{FF2B5EF4-FFF2-40B4-BE49-F238E27FC236}">
-                <a16:creationId xmlns:a16="http://schemas.microsoft.com/office/drawing/2014/main" id="{90FA006B-711D-D2C5-3E87-9A148F448845}"/>
+                <a16:creationId xmlns:a16="http://schemas.microsoft.com/office/drawing/2014/main" xmlns="" id="{90FA006B-711D-D2C5-3E87-9A148F448845}"/>
               </a:ext>
             </a:extLst>
           </p:cNvPr>
@@ -794,7 +800,7 @@
           <p:cNvPr id="3" name="Content Placeholder 2">
             <a:extLst>
               <a:ext uri="{FF2B5EF4-FFF2-40B4-BE49-F238E27FC236}">
-                <a16:creationId xmlns:a16="http://schemas.microsoft.com/office/drawing/2014/main" id="{93FFCC52-607C-F3BA-7610-8F3B6106F354}"/>
+                <a16:creationId xmlns:a16="http://schemas.microsoft.com/office/drawing/2014/main" xmlns="" id="{93FFCC52-607C-F3BA-7610-8F3B6106F354}"/>
               </a:ext>
             </a:extLst>
           </p:cNvPr>
@@ -852,7 +858,7 @@
           <p:cNvPr id="4" name="Date Placeholder 3">
             <a:extLst>
               <a:ext uri="{FF2B5EF4-FFF2-40B4-BE49-F238E27FC236}">
-                <a16:creationId xmlns:a16="http://schemas.microsoft.com/office/drawing/2014/main" id="{2B879F16-D325-84C4-5BA5-73505208D9CA}"/>
+                <a16:creationId xmlns:a16="http://schemas.microsoft.com/office/drawing/2014/main" xmlns="" id="{2B879F16-D325-84C4-5BA5-73505208D9CA}"/>
               </a:ext>
             </a:extLst>
           </p:cNvPr>
@@ -870,7 +876,7 @@
           <a:p>
             <a:fld id="{C1B26918-AFA0-4981-BA75-A361DECE8A45}" type="datetimeFigureOut">
               <a:rPr lang="en-IN" smtClean="0"/>
-              <a:t>07-02-2024</a:t>
+              <a:t>23-03-2026</a:t>
             </a:fld>
             <a:endParaRPr lang="en-IN"/>
           </a:p>
@@ -881,7 +887,7 @@
           <p:cNvPr id="5" name="Footer Placeholder 4">
             <a:extLst>
               <a:ext uri="{FF2B5EF4-FFF2-40B4-BE49-F238E27FC236}">
-                <a16:creationId xmlns:a16="http://schemas.microsoft.com/office/drawing/2014/main" id="{05030972-2DD2-9F1A-AB0D-59BE27B22FA6}"/>
+                <a16:creationId xmlns:a16="http://schemas.microsoft.com/office/drawing/2014/main" xmlns="" id="{05030972-2DD2-9F1A-AB0D-59BE27B22FA6}"/>
               </a:ext>
             </a:extLst>
           </p:cNvPr>
@@ -906,7 +912,7 @@
           <p:cNvPr id="6" name="Slide Number Placeholder 5">
             <a:extLst>
               <a:ext uri="{FF2B5EF4-FFF2-40B4-BE49-F238E27FC236}">
-                <a16:creationId xmlns:a16="http://schemas.microsoft.com/office/drawing/2014/main" id="{28954855-4725-11FD-E5B3-3121DC0DBC8E}"/>
+                <a16:creationId xmlns:a16="http://schemas.microsoft.com/office/drawing/2014/main" xmlns="" id="{28954855-4725-11FD-E5B3-3121DC0DBC8E}"/>
               </a:ext>
             </a:extLst>
           </p:cNvPr>
@@ -965,7 +971,7 @@
           <p:cNvPr id="2" name="Title 1">
             <a:extLst>
               <a:ext uri="{FF2B5EF4-FFF2-40B4-BE49-F238E27FC236}">
-                <a16:creationId xmlns:a16="http://schemas.microsoft.com/office/drawing/2014/main" id="{B2E62867-498D-FCEC-A43F-A2C29867030B}"/>
+                <a16:creationId xmlns:a16="http://schemas.microsoft.com/office/drawing/2014/main" xmlns="" id="{B2E62867-498D-FCEC-A43F-A2C29867030B}"/>
               </a:ext>
             </a:extLst>
           </p:cNvPr>
@@ -1003,7 +1009,7 @@
           <p:cNvPr id="3" name="Text Placeholder 2">
             <a:extLst>
               <a:ext uri="{FF2B5EF4-FFF2-40B4-BE49-F238E27FC236}">
-                <a16:creationId xmlns:a16="http://schemas.microsoft.com/office/drawing/2014/main" id="{3FA834A6-045D-40A6-B2A3-FB6482F3D79E}"/>
+                <a16:creationId xmlns:a16="http://schemas.microsoft.com/office/drawing/2014/main" xmlns="" id="{3FA834A6-045D-40A6-B2A3-FB6482F3D79E}"/>
               </a:ext>
             </a:extLst>
           </p:cNvPr>
@@ -1128,7 +1134,7 @@
           <p:cNvPr id="4" name="Date Placeholder 3">
             <a:extLst>
               <a:ext uri="{FF2B5EF4-FFF2-40B4-BE49-F238E27FC236}">
-                <a16:creationId xmlns:a16="http://schemas.microsoft.com/office/drawing/2014/main" id="{BEC5CE6C-9943-9E76-8318-D8FAA5E2DD02}"/>
+                <a16:creationId xmlns:a16="http://schemas.microsoft.com/office/drawing/2014/main" xmlns="" id="{BEC5CE6C-9943-9E76-8318-D8FAA5E2DD02}"/>
               </a:ext>
             </a:extLst>
           </p:cNvPr>
@@ -1146,7 +1152,7 @@
           <a:p>
             <a:fld id="{C1B26918-AFA0-4981-BA75-A361DECE8A45}" type="datetimeFigureOut">
               <a:rPr lang="en-IN" smtClean="0"/>
-              <a:t>07-02-2024</a:t>
+              <a:t>23-03-2026</a:t>
             </a:fld>
             <a:endParaRPr lang="en-IN"/>
           </a:p>
@@ -1157,7 +1163,7 @@
           <p:cNvPr id="5" name="Footer Placeholder 4">
             <a:extLst>
               <a:ext uri="{FF2B5EF4-FFF2-40B4-BE49-F238E27FC236}">
-                <a16:creationId xmlns:a16="http://schemas.microsoft.com/office/drawing/2014/main" id="{CCB6CE95-4C8D-1973-6258-460DDA6A041B}"/>
+                <a16:creationId xmlns:a16="http://schemas.microsoft.com/office/drawing/2014/main" xmlns="" id="{CCB6CE95-4C8D-1973-6258-460DDA6A041B}"/>
               </a:ext>
             </a:extLst>
           </p:cNvPr>
@@ -1182,7 +1188,7 @@
           <p:cNvPr id="6" name="Slide Number Placeholder 5">
             <a:extLst>
               <a:ext uri="{FF2B5EF4-FFF2-40B4-BE49-F238E27FC236}">
-                <a16:creationId xmlns:a16="http://schemas.microsoft.com/office/drawing/2014/main" id="{D78C96E0-9B47-7A02-3FB7-18412E013800}"/>
+                <a16:creationId xmlns:a16="http://schemas.microsoft.com/office/drawing/2014/main" xmlns="" id="{D78C96E0-9B47-7A02-3FB7-18412E013800}"/>
               </a:ext>
             </a:extLst>
           </p:cNvPr>
@@ -1241,7 +1247,7 @@
           <p:cNvPr id="2" name="Title 1">
             <a:extLst>
               <a:ext uri="{FF2B5EF4-FFF2-40B4-BE49-F238E27FC236}">
-                <a16:creationId xmlns:a16="http://schemas.microsoft.com/office/drawing/2014/main" id="{69776DCA-1E60-F960-5E0D-14A6E097405D}"/>
+                <a16:creationId xmlns:a16="http://schemas.microsoft.com/office/drawing/2014/main" xmlns="" id="{69776DCA-1E60-F960-5E0D-14A6E097405D}"/>
               </a:ext>
             </a:extLst>
           </p:cNvPr>
@@ -1270,7 +1276,7 @@
           <p:cNvPr id="3" name="Content Placeholder 2">
             <a:extLst>
               <a:ext uri="{FF2B5EF4-FFF2-40B4-BE49-F238E27FC236}">
-                <a16:creationId xmlns:a16="http://schemas.microsoft.com/office/drawing/2014/main" id="{119D1F12-BC31-A0AA-7004-D5AF57643025}"/>
+                <a16:creationId xmlns:a16="http://schemas.microsoft.com/office/drawing/2014/main" xmlns="" id="{119D1F12-BC31-A0AA-7004-D5AF57643025}"/>
               </a:ext>
             </a:extLst>
           </p:cNvPr>
@@ -1333,7 +1339,7 @@
           <p:cNvPr id="4" name="Content Placeholder 3">
             <a:extLst>
               <a:ext uri="{FF2B5EF4-FFF2-40B4-BE49-F238E27FC236}">
-                <a16:creationId xmlns:a16="http://schemas.microsoft.com/office/drawing/2014/main" id="{C823D939-C885-2970-A609-9BDFB921B36D}"/>
+                <a16:creationId xmlns:a16="http://schemas.microsoft.com/office/drawing/2014/main" xmlns="" id="{C823D939-C885-2970-A609-9BDFB921B36D}"/>
               </a:ext>
             </a:extLst>
           </p:cNvPr>
@@ -1396,7 +1402,7 @@
           <p:cNvPr id="5" name="Date Placeholder 4">
             <a:extLst>
               <a:ext uri="{FF2B5EF4-FFF2-40B4-BE49-F238E27FC236}">
-                <a16:creationId xmlns:a16="http://schemas.microsoft.com/office/drawing/2014/main" id="{676C3237-96C8-0ADD-05FB-A20FD39B10E2}"/>
+                <a16:creationId xmlns:a16="http://schemas.microsoft.com/office/drawing/2014/main" xmlns="" id="{676C3237-96C8-0ADD-05FB-A20FD39B10E2}"/>
               </a:ext>
             </a:extLst>
           </p:cNvPr>
@@ -1414,7 +1420,7 @@
           <a:p>
             <a:fld id="{C1B26918-AFA0-4981-BA75-A361DECE8A45}" type="datetimeFigureOut">
               <a:rPr lang="en-IN" smtClean="0"/>
-              <a:t>07-02-2024</a:t>
+              <a:t>23-03-2026</a:t>
             </a:fld>
             <a:endParaRPr lang="en-IN"/>
           </a:p>
@@ -1425,7 +1431,7 @@
           <p:cNvPr id="6" name="Footer Placeholder 5">
             <a:extLst>
               <a:ext uri="{FF2B5EF4-FFF2-40B4-BE49-F238E27FC236}">
-                <a16:creationId xmlns:a16="http://schemas.microsoft.com/office/drawing/2014/main" id="{0F9071DE-6E1D-497D-5A10-35E6064B188F}"/>
+                <a16:creationId xmlns:a16="http://schemas.microsoft.com/office/drawing/2014/main" xmlns="" id="{0F9071DE-6E1D-497D-5A10-35E6064B188F}"/>
               </a:ext>
             </a:extLst>
           </p:cNvPr>
@@ -1450,7 +1456,7 @@
           <p:cNvPr id="7" name="Slide Number Placeholder 6">
             <a:extLst>
               <a:ext uri="{FF2B5EF4-FFF2-40B4-BE49-F238E27FC236}">
-                <a16:creationId xmlns:a16="http://schemas.microsoft.com/office/drawing/2014/main" id="{D446943A-12A8-3300-9CB8-F18877D7F2E4}"/>
+                <a16:creationId xmlns:a16="http://schemas.microsoft.com/office/drawing/2014/main" xmlns="" id="{D446943A-12A8-3300-9CB8-F18877D7F2E4}"/>
               </a:ext>
             </a:extLst>
           </p:cNvPr>
@@ -1509,7 +1515,7 @@
           <p:cNvPr id="2" name="Title 1">
             <a:extLst>
               <a:ext uri="{FF2B5EF4-FFF2-40B4-BE49-F238E27FC236}">
-                <a16:creationId xmlns:a16="http://schemas.microsoft.com/office/drawing/2014/main" id="{D70B66B7-6D8B-1B0E-5694-A066E043000E}"/>
+                <a16:creationId xmlns:a16="http://schemas.microsoft.com/office/drawing/2014/main" xmlns="" id="{D70B66B7-6D8B-1B0E-5694-A066E043000E}"/>
               </a:ext>
             </a:extLst>
           </p:cNvPr>
@@ -1543,7 +1549,7 @@
           <p:cNvPr id="3" name="Text Placeholder 2">
             <a:extLst>
               <a:ext uri="{FF2B5EF4-FFF2-40B4-BE49-F238E27FC236}">
-                <a16:creationId xmlns:a16="http://schemas.microsoft.com/office/drawing/2014/main" id="{1482BB64-3B78-94CB-2EF9-8B59CA65FC54}"/>
+                <a16:creationId xmlns:a16="http://schemas.microsoft.com/office/drawing/2014/main" xmlns="" id="{1482BB64-3B78-94CB-2EF9-8B59CA65FC54}"/>
               </a:ext>
             </a:extLst>
           </p:cNvPr>
@@ -1614,7 +1620,7 @@
           <p:cNvPr id="4" name="Content Placeholder 3">
             <a:extLst>
               <a:ext uri="{FF2B5EF4-FFF2-40B4-BE49-F238E27FC236}">
-                <a16:creationId xmlns:a16="http://schemas.microsoft.com/office/drawing/2014/main" id="{8CC07613-5101-3164-D271-8F5E862EE3CB}"/>
+                <a16:creationId xmlns:a16="http://schemas.microsoft.com/office/drawing/2014/main" xmlns="" id="{8CC07613-5101-3164-D271-8F5E862EE3CB}"/>
               </a:ext>
             </a:extLst>
           </p:cNvPr>
@@ -1677,7 +1683,7 @@
           <p:cNvPr id="5" name="Text Placeholder 4">
             <a:extLst>
               <a:ext uri="{FF2B5EF4-FFF2-40B4-BE49-F238E27FC236}">
-                <a16:creationId xmlns:a16="http://schemas.microsoft.com/office/drawing/2014/main" id="{A3D94B76-6417-DD18-3663-A404C9175E60}"/>
+                <a16:creationId xmlns:a16="http://schemas.microsoft.com/office/drawing/2014/main" xmlns="" id="{A3D94B76-6417-DD18-3663-A404C9175E60}"/>
               </a:ext>
             </a:extLst>
           </p:cNvPr>
@@ -1748,7 +1754,7 @@
           <p:cNvPr id="6" name="Content Placeholder 5">
             <a:extLst>
               <a:ext uri="{FF2B5EF4-FFF2-40B4-BE49-F238E27FC236}">
-                <a16:creationId xmlns:a16="http://schemas.microsoft.com/office/drawing/2014/main" id="{A50B749C-F1DF-9A88-8A5E-14747A3232EE}"/>
+                <a16:creationId xmlns:a16="http://schemas.microsoft.com/office/drawing/2014/main" xmlns="" id="{A50B749C-F1DF-9A88-8A5E-14747A3232EE}"/>
               </a:ext>
             </a:extLst>
           </p:cNvPr>
@@ -1811,7 +1817,7 @@
           <p:cNvPr id="7" name="Date Placeholder 6">
             <a:extLst>
               <a:ext uri="{FF2B5EF4-FFF2-40B4-BE49-F238E27FC236}">
-                <a16:creationId xmlns:a16="http://schemas.microsoft.com/office/drawing/2014/main" id="{C7B1AE95-C7B6-70D4-96A8-7B6ABE93ABAF}"/>
+                <a16:creationId xmlns:a16="http://schemas.microsoft.com/office/drawing/2014/main" xmlns="" id="{C7B1AE95-C7B6-70D4-96A8-7B6ABE93ABAF}"/>
               </a:ext>
             </a:extLst>
           </p:cNvPr>
@@ -1829,7 +1835,7 @@
           <a:p>
             <a:fld id="{C1B26918-AFA0-4981-BA75-A361DECE8A45}" type="datetimeFigureOut">
               <a:rPr lang="en-IN" smtClean="0"/>
-              <a:t>07-02-2024</a:t>
+              <a:t>23-03-2026</a:t>
             </a:fld>
             <a:endParaRPr lang="en-IN"/>
           </a:p>
@@ -1840,7 +1846,7 @@
           <p:cNvPr id="8" name="Footer Placeholder 7">
             <a:extLst>
               <a:ext uri="{FF2B5EF4-FFF2-40B4-BE49-F238E27FC236}">
-                <a16:creationId xmlns:a16="http://schemas.microsoft.com/office/drawing/2014/main" id="{6D74CFAA-4BBD-5643-79EA-A17B70AFAEE5}"/>
+                <a16:creationId xmlns:a16="http://schemas.microsoft.com/office/drawing/2014/main" xmlns="" id="{6D74CFAA-4BBD-5643-79EA-A17B70AFAEE5}"/>
               </a:ext>
             </a:extLst>
           </p:cNvPr>
@@ -1865,7 +1871,7 @@
           <p:cNvPr id="9" name="Slide Number Placeholder 8">
             <a:extLst>
               <a:ext uri="{FF2B5EF4-FFF2-40B4-BE49-F238E27FC236}">
-                <a16:creationId xmlns:a16="http://schemas.microsoft.com/office/drawing/2014/main" id="{112650D8-6169-E315-D047-D97E7B168997}"/>
+                <a16:creationId xmlns:a16="http://schemas.microsoft.com/office/drawing/2014/main" xmlns="" id="{112650D8-6169-E315-D047-D97E7B168997}"/>
               </a:ext>
             </a:extLst>
           </p:cNvPr>
@@ -1924,7 +1930,7 @@
           <p:cNvPr id="2" name="Title 1">
             <a:extLst>
               <a:ext uri="{FF2B5EF4-FFF2-40B4-BE49-F238E27FC236}">
-                <a16:creationId xmlns:a16="http://schemas.microsoft.com/office/drawing/2014/main" id="{2C0F3992-D997-F05A-21B9-85B55CCD2683}"/>
+                <a16:creationId xmlns:a16="http://schemas.microsoft.com/office/drawing/2014/main" xmlns="" id="{2C0F3992-D997-F05A-21B9-85B55CCD2683}"/>
               </a:ext>
             </a:extLst>
           </p:cNvPr>
@@ -1953,7 +1959,7 @@
           <p:cNvPr id="3" name="Date Placeholder 2">
             <a:extLst>
               <a:ext uri="{FF2B5EF4-FFF2-40B4-BE49-F238E27FC236}">
-                <a16:creationId xmlns:a16="http://schemas.microsoft.com/office/drawing/2014/main" id="{482DFA9B-B926-B722-A6B0-169D5510835A}"/>
+                <a16:creationId xmlns:a16="http://schemas.microsoft.com/office/drawing/2014/main" xmlns="" id="{482DFA9B-B926-B722-A6B0-169D5510835A}"/>
               </a:ext>
             </a:extLst>
           </p:cNvPr>
@@ -1971,7 +1977,7 @@
           <a:p>
             <a:fld id="{C1B26918-AFA0-4981-BA75-A361DECE8A45}" type="datetimeFigureOut">
               <a:rPr lang="en-IN" smtClean="0"/>
-              <a:t>07-02-2024</a:t>
+              <a:t>23-03-2026</a:t>
             </a:fld>
             <a:endParaRPr lang="en-IN"/>
           </a:p>
@@ -1982,7 +1988,7 @@
           <p:cNvPr id="4" name="Footer Placeholder 3">
             <a:extLst>
               <a:ext uri="{FF2B5EF4-FFF2-40B4-BE49-F238E27FC236}">
-                <a16:creationId xmlns:a16="http://schemas.microsoft.com/office/drawing/2014/main" id="{24BB1E9D-14BE-1FEC-9D5E-53D6F04A4457}"/>
+                <a16:creationId xmlns:a16="http://schemas.microsoft.com/office/drawing/2014/main" xmlns="" id="{24BB1E9D-14BE-1FEC-9D5E-53D6F04A4457}"/>
               </a:ext>
             </a:extLst>
           </p:cNvPr>
@@ -2007,7 +2013,7 @@
           <p:cNvPr id="5" name="Slide Number Placeholder 4">
             <a:extLst>
               <a:ext uri="{FF2B5EF4-FFF2-40B4-BE49-F238E27FC236}">
-                <a16:creationId xmlns:a16="http://schemas.microsoft.com/office/drawing/2014/main" id="{F6E0B78B-33AA-18E1-3D57-8C813A39084C}"/>
+                <a16:creationId xmlns:a16="http://schemas.microsoft.com/office/drawing/2014/main" xmlns="" id="{F6E0B78B-33AA-18E1-3D57-8C813A39084C}"/>
               </a:ext>
             </a:extLst>
           </p:cNvPr>
@@ -2066,7 +2072,7 @@
           <p:cNvPr id="2" name="Date Placeholder 1">
             <a:extLst>
               <a:ext uri="{FF2B5EF4-FFF2-40B4-BE49-F238E27FC236}">
-                <a16:creationId xmlns:a16="http://schemas.microsoft.com/office/drawing/2014/main" id="{D9B937BD-0A9A-3E2D-384D-F9822A6850FA}"/>
+                <a16:creationId xmlns:a16="http://schemas.microsoft.com/office/drawing/2014/main" xmlns="" id="{D9B937BD-0A9A-3E2D-384D-F9822A6850FA}"/>
               </a:ext>
             </a:extLst>
           </p:cNvPr>
@@ -2084,7 +2090,7 @@
           <a:p>
             <a:fld id="{C1B26918-AFA0-4981-BA75-A361DECE8A45}" type="datetimeFigureOut">
               <a:rPr lang="en-IN" smtClean="0"/>
-              <a:t>07-02-2024</a:t>
+              <a:t>23-03-2026</a:t>
             </a:fld>
             <a:endParaRPr lang="en-IN"/>
           </a:p>
@@ -2095,7 +2101,7 @@
           <p:cNvPr id="3" name="Footer Placeholder 2">
             <a:extLst>
               <a:ext uri="{FF2B5EF4-FFF2-40B4-BE49-F238E27FC236}">
-                <a16:creationId xmlns:a16="http://schemas.microsoft.com/office/drawing/2014/main" id="{1A779C50-F636-4C5D-BCC4-8BBA59210186}"/>
+                <a16:creationId xmlns:a16="http://schemas.microsoft.com/office/drawing/2014/main" xmlns="" id="{1A779C50-F636-4C5D-BCC4-8BBA59210186}"/>
               </a:ext>
             </a:extLst>
           </p:cNvPr>
@@ -2120,7 +2126,7 @@
           <p:cNvPr id="4" name="Slide Number Placeholder 3">
             <a:extLst>
               <a:ext uri="{FF2B5EF4-FFF2-40B4-BE49-F238E27FC236}">
-                <a16:creationId xmlns:a16="http://schemas.microsoft.com/office/drawing/2014/main" id="{58BDB855-78A0-E4C9-3BCB-049A820DA524}"/>
+                <a16:creationId xmlns:a16="http://schemas.microsoft.com/office/drawing/2014/main" xmlns="" id="{58BDB855-78A0-E4C9-3BCB-049A820DA524}"/>
               </a:ext>
             </a:extLst>
           </p:cNvPr>
@@ -2179,7 +2185,7 @@
           <p:cNvPr id="2" name="Title 1">
             <a:extLst>
               <a:ext uri="{FF2B5EF4-FFF2-40B4-BE49-F238E27FC236}">
-                <a16:creationId xmlns:a16="http://schemas.microsoft.com/office/drawing/2014/main" id="{3F3A6CF2-EF5B-FB73-9EFA-D0E4B32FDC2D}"/>
+                <a16:creationId xmlns:a16="http://schemas.microsoft.com/office/drawing/2014/main" xmlns="" id="{3F3A6CF2-EF5B-FB73-9EFA-D0E4B32FDC2D}"/>
               </a:ext>
             </a:extLst>
           </p:cNvPr>
@@ -2217,7 +2223,7 @@
           <p:cNvPr id="3" name="Content Placeholder 2">
             <a:extLst>
               <a:ext uri="{FF2B5EF4-FFF2-40B4-BE49-F238E27FC236}">
-                <a16:creationId xmlns:a16="http://schemas.microsoft.com/office/drawing/2014/main" id="{88307A76-ED99-3F23-6CF9-AF7DCC2784D9}"/>
+                <a16:creationId xmlns:a16="http://schemas.microsoft.com/office/drawing/2014/main" xmlns="" id="{88307A76-ED99-3F23-6CF9-AF7DCC2784D9}"/>
               </a:ext>
             </a:extLst>
           </p:cNvPr>
@@ -2308,7 +2314,7 @@
           <p:cNvPr id="4" name="Text Placeholder 3">
             <a:extLst>
               <a:ext uri="{FF2B5EF4-FFF2-40B4-BE49-F238E27FC236}">
-                <a16:creationId xmlns:a16="http://schemas.microsoft.com/office/drawing/2014/main" id="{B1E5AF82-38E9-025A-56C9-A40B4C7B39E4}"/>
+                <a16:creationId xmlns:a16="http://schemas.microsoft.com/office/drawing/2014/main" xmlns="" id="{B1E5AF82-38E9-025A-56C9-A40B4C7B39E4}"/>
               </a:ext>
             </a:extLst>
           </p:cNvPr>
@@ -2379,7 +2385,7 @@
           <p:cNvPr id="5" name="Date Placeholder 4">
             <a:extLst>
               <a:ext uri="{FF2B5EF4-FFF2-40B4-BE49-F238E27FC236}">
-                <a16:creationId xmlns:a16="http://schemas.microsoft.com/office/drawing/2014/main" id="{560BB613-04FD-071D-EE0E-22C30DCE35A9}"/>
+                <a16:creationId xmlns:a16="http://schemas.microsoft.com/office/drawing/2014/main" xmlns="" id="{560BB613-04FD-071D-EE0E-22C30DCE35A9}"/>
               </a:ext>
             </a:extLst>
           </p:cNvPr>
@@ -2397,7 +2403,7 @@
           <a:p>
             <a:fld id="{C1B26918-AFA0-4981-BA75-A361DECE8A45}" type="datetimeFigureOut">
               <a:rPr lang="en-IN" smtClean="0"/>
-              <a:t>07-02-2024</a:t>
+              <a:t>23-03-2026</a:t>
             </a:fld>
             <a:endParaRPr lang="en-IN"/>
           </a:p>
@@ -2408,7 +2414,7 @@
           <p:cNvPr id="6" name="Footer Placeholder 5">
             <a:extLst>
               <a:ext uri="{FF2B5EF4-FFF2-40B4-BE49-F238E27FC236}">
-                <a16:creationId xmlns:a16="http://schemas.microsoft.com/office/drawing/2014/main" id="{08F28DB1-CD1B-64FC-2EBF-D5C7908D4DF1}"/>
+                <a16:creationId xmlns:a16="http://schemas.microsoft.com/office/drawing/2014/main" xmlns="" id="{08F28DB1-CD1B-64FC-2EBF-D5C7908D4DF1}"/>
               </a:ext>
             </a:extLst>
           </p:cNvPr>
@@ -2433,7 +2439,7 @@
           <p:cNvPr id="7" name="Slide Number Placeholder 6">
             <a:extLst>
               <a:ext uri="{FF2B5EF4-FFF2-40B4-BE49-F238E27FC236}">
-                <a16:creationId xmlns:a16="http://schemas.microsoft.com/office/drawing/2014/main" id="{941F43A8-674D-3F31-F9F2-3A2962BFDDEC}"/>
+                <a16:creationId xmlns:a16="http://schemas.microsoft.com/office/drawing/2014/main" xmlns="" id="{941F43A8-674D-3F31-F9F2-3A2962BFDDEC}"/>
               </a:ext>
             </a:extLst>
           </p:cNvPr>
@@ -2492,7 +2498,7 @@
           <p:cNvPr id="2" name="Title 1">
             <a:extLst>
               <a:ext uri="{FF2B5EF4-FFF2-40B4-BE49-F238E27FC236}">
-                <a16:creationId xmlns:a16="http://schemas.microsoft.com/office/drawing/2014/main" id="{D3BFEA17-64DD-2B8D-5AD5-D384BFF6AD31}"/>
+                <a16:creationId xmlns:a16="http://schemas.microsoft.com/office/drawing/2014/main" xmlns="" id="{D3BFEA17-64DD-2B8D-5AD5-D384BFF6AD31}"/>
               </a:ext>
             </a:extLst>
           </p:cNvPr>
@@ -2530,7 +2536,7 @@
           <p:cNvPr id="3" name="Picture Placeholder 2">
             <a:extLst>
               <a:ext uri="{FF2B5EF4-FFF2-40B4-BE49-F238E27FC236}">
-                <a16:creationId xmlns:a16="http://schemas.microsoft.com/office/drawing/2014/main" id="{914B5401-6B38-BBCA-DF31-BF94E311549C}"/>
+                <a16:creationId xmlns:a16="http://schemas.microsoft.com/office/drawing/2014/main" xmlns="" id="{914B5401-6B38-BBCA-DF31-BF94E311549C}"/>
               </a:ext>
             </a:extLst>
           </p:cNvPr>
@@ -2597,7 +2603,7 @@
           <p:cNvPr id="4" name="Text Placeholder 3">
             <a:extLst>
               <a:ext uri="{FF2B5EF4-FFF2-40B4-BE49-F238E27FC236}">
-                <a16:creationId xmlns:a16="http://schemas.microsoft.com/office/drawing/2014/main" id="{C5D78FDF-E00F-0832-184F-E2DC4B2E3EF1}"/>
+                <a16:creationId xmlns:a16="http://schemas.microsoft.com/office/drawing/2014/main" xmlns="" id="{C5D78FDF-E00F-0832-184F-E2DC4B2E3EF1}"/>
               </a:ext>
             </a:extLst>
           </p:cNvPr>
@@ -2668,7 +2674,7 @@
           <p:cNvPr id="5" name="Date Placeholder 4">
             <a:extLst>
               <a:ext uri="{FF2B5EF4-FFF2-40B4-BE49-F238E27FC236}">
-                <a16:creationId xmlns:a16="http://schemas.microsoft.com/office/drawing/2014/main" id="{A8909C37-DA77-9EA3-63C2-450C5E7D92A4}"/>
+                <a16:creationId xmlns:a16="http://schemas.microsoft.com/office/drawing/2014/main" xmlns="" id="{A8909C37-DA77-9EA3-63C2-450C5E7D92A4}"/>
               </a:ext>
             </a:extLst>
           </p:cNvPr>
@@ -2686,7 +2692,7 @@
           <a:p>
             <a:fld id="{C1B26918-AFA0-4981-BA75-A361DECE8A45}" type="datetimeFigureOut">
               <a:rPr lang="en-IN" smtClean="0"/>
-              <a:t>07-02-2024</a:t>
+              <a:t>23-03-2026</a:t>
             </a:fld>
             <a:endParaRPr lang="en-IN"/>
           </a:p>
@@ -2697,7 +2703,7 @@
           <p:cNvPr id="6" name="Footer Placeholder 5">
             <a:extLst>
               <a:ext uri="{FF2B5EF4-FFF2-40B4-BE49-F238E27FC236}">
-                <a16:creationId xmlns:a16="http://schemas.microsoft.com/office/drawing/2014/main" id="{8631B489-6EBF-69C5-01EA-805E1BF554FF}"/>
+                <a16:creationId xmlns:a16="http://schemas.microsoft.com/office/drawing/2014/main" xmlns="" id="{8631B489-6EBF-69C5-01EA-805E1BF554FF}"/>
               </a:ext>
             </a:extLst>
           </p:cNvPr>
@@ -2722,7 +2728,7 @@
           <p:cNvPr id="7" name="Slide Number Placeholder 6">
             <a:extLst>
               <a:ext uri="{FF2B5EF4-FFF2-40B4-BE49-F238E27FC236}">
-                <a16:creationId xmlns:a16="http://schemas.microsoft.com/office/drawing/2014/main" id="{1714E895-3F43-DB01-869F-D10206503246}"/>
+                <a16:creationId xmlns:a16="http://schemas.microsoft.com/office/drawing/2014/main" xmlns="" id="{1714E895-3F43-DB01-869F-D10206503246}"/>
               </a:ext>
             </a:extLst>
           </p:cNvPr>
@@ -2786,7 +2792,7 @@
           <p:cNvPr id="2" name="Title Placeholder 1">
             <a:extLst>
               <a:ext uri="{FF2B5EF4-FFF2-40B4-BE49-F238E27FC236}">
-                <a16:creationId xmlns:a16="http://schemas.microsoft.com/office/drawing/2014/main" id="{FB822C3B-DCC2-09E4-BCE6-33234D4C2A19}"/>
+                <a16:creationId xmlns:a16="http://schemas.microsoft.com/office/drawing/2014/main" xmlns="" id="{FB822C3B-DCC2-09E4-BCE6-33234D4C2A19}"/>
               </a:ext>
             </a:extLst>
           </p:cNvPr>
@@ -2825,7 +2831,7 @@
           <p:cNvPr id="3" name="Text Placeholder 2">
             <a:extLst>
               <a:ext uri="{FF2B5EF4-FFF2-40B4-BE49-F238E27FC236}">
-                <a16:creationId xmlns:a16="http://schemas.microsoft.com/office/drawing/2014/main" id="{1ED38327-1AD6-CF01-B993-9282B20ABCAE}"/>
+                <a16:creationId xmlns:a16="http://schemas.microsoft.com/office/drawing/2014/main" xmlns="" id="{1ED38327-1AD6-CF01-B993-9282B20ABCAE}"/>
               </a:ext>
             </a:extLst>
           </p:cNvPr>
@@ -2893,7 +2899,7 @@
           <p:cNvPr id="4" name="Date Placeholder 3">
             <a:extLst>
               <a:ext uri="{FF2B5EF4-FFF2-40B4-BE49-F238E27FC236}">
-                <a16:creationId xmlns:a16="http://schemas.microsoft.com/office/drawing/2014/main" id="{CE3B010D-FCC0-4BAF-1EA6-99632AE15D88}"/>
+                <a16:creationId xmlns:a16="http://schemas.microsoft.com/office/drawing/2014/main" xmlns="" id="{CE3B010D-FCC0-4BAF-1EA6-99632AE15D88}"/>
               </a:ext>
             </a:extLst>
           </p:cNvPr>
@@ -2929,7 +2935,7 @@
           <a:p>
             <a:fld id="{C1B26918-AFA0-4981-BA75-A361DECE8A45}" type="datetimeFigureOut">
               <a:rPr lang="en-IN" smtClean="0"/>
-              <a:t>07-02-2024</a:t>
+              <a:t>23-03-2026</a:t>
             </a:fld>
             <a:endParaRPr lang="en-IN"/>
           </a:p>
@@ -2940,7 +2946,7 @@
           <p:cNvPr id="5" name="Footer Placeholder 4">
             <a:extLst>
               <a:ext uri="{FF2B5EF4-FFF2-40B4-BE49-F238E27FC236}">
-                <a16:creationId xmlns:a16="http://schemas.microsoft.com/office/drawing/2014/main" id="{14BDB501-891D-92B7-5AF9-E4FA26BCA378}"/>
+                <a16:creationId xmlns:a16="http://schemas.microsoft.com/office/drawing/2014/main" xmlns="" id="{14BDB501-891D-92B7-5AF9-E4FA26BCA378}"/>
               </a:ext>
             </a:extLst>
           </p:cNvPr>
@@ -2983,7 +2989,7 @@
           <p:cNvPr id="6" name="Slide Number Placeholder 5">
             <a:extLst>
               <a:ext uri="{FF2B5EF4-FFF2-40B4-BE49-F238E27FC236}">
-                <a16:creationId xmlns:a16="http://schemas.microsoft.com/office/drawing/2014/main" id="{D4BF06B9-641F-3F9D-41F9-B521B93C161C}"/>
+                <a16:creationId xmlns:a16="http://schemas.microsoft.com/office/drawing/2014/main" xmlns="" id="{D4BF06B9-641F-3F9D-41F9-B521B93C161C}"/>
               </a:ext>
             </a:extLst>
           </p:cNvPr>
@@ -3351,7 +3357,7 @@
           <p:cNvPr id="2" name="Title 1">
             <a:extLst>
               <a:ext uri="{FF2B5EF4-FFF2-40B4-BE49-F238E27FC236}">
-                <a16:creationId xmlns:a16="http://schemas.microsoft.com/office/drawing/2014/main" id="{4207C2D6-D231-5BA4-CCFE-7A8D6481FB5B}"/>
+                <a16:creationId xmlns:a16="http://schemas.microsoft.com/office/drawing/2014/main" xmlns="" id="{4207C2D6-D231-5BA4-CCFE-7A8D6481FB5B}"/>
               </a:ext>
             </a:extLst>
           </p:cNvPr>
@@ -3379,7 +3385,7 @@
           <p:cNvPr id="3" name="Subtitle 2">
             <a:extLst>
               <a:ext uri="{FF2B5EF4-FFF2-40B4-BE49-F238E27FC236}">
-                <a16:creationId xmlns:a16="http://schemas.microsoft.com/office/drawing/2014/main" id="{78C92A7B-DD1F-ABEF-0F00-DCE0AAB85293}"/>
+                <a16:creationId xmlns:a16="http://schemas.microsoft.com/office/drawing/2014/main" xmlns="" id="{78C92A7B-DD1F-ABEF-0F00-DCE0AAB85293}"/>
               </a:ext>
             </a:extLst>
           </p:cNvPr>
@@ -3416,6 +3422,13 @@
   <p:clrMapOvr>
     <a:masterClrMapping/>
   </p:clrMapOvr>
+  <p:timing>
+    <p:tnLst>
+      <p:par>
+        <p:cTn id="1" dur="indefinite" restart="never" nodeType="tmRoot"/>
+      </p:par>
+    </p:tnLst>
+  </p:timing>
 </p:sld>
 </file>
 
@@ -3441,7 +3454,7 @@
           <p:cNvPr id="2" name="Title 1">
             <a:extLst>
               <a:ext uri="{FF2B5EF4-FFF2-40B4-BE49-F238E27FC236}">
-                <a16:creationId xmlns:a16="http://schemas.microsoft.com/office/drawing/2014/main" id="{8D5B77B9-9D4B-313E-F584-B57C58F9EE6B}"/>
+                <a16:creationId xmlns:a16="http://schemas.microsoft.com/office/drawing/2014/main" xmlns="" id="{8D5B77B9-9D4B-313E-F584-B57C58F9EE6B}"/>
               </a:ext>
             </a:extLst>
           </p:cNvPr>
@@ -3486,7 +3499,7 @@
           <p:cNvPr id="3" name="Content Placeholder 2">
             <a:extLst>
               <a:ext uri="{FF2B5EF4-FFF2-40B4-BE49-F238E27FC236}">
-                <a16:creationId xmlns:a16="http://schemas.microsoft.com/office/drawing/2014/main" id="{0A29B049-0310-038D-E98D-DB764CDDAFA9}"/>
+                <a16:creationId xmlns:a16="http://schemas.microsoft.com/office/drawing/2014/main" xmlns="" id="{0A29B049-0310-038D-E98D-DB764CDDAFA9}"/>
               </a:ext>
             </a:extLst>
           </p:cNvPr>
@@ -3574,6 +3587,13 @@
   <p:clrMapOvr>
     <a:masterClrMapping/>
   </p:clrMapOvr>
+  <p:timing>
+    <p:tnLst>
+      <p:par>
+        <p:cTn id="1" dur="indefinite" restart="never" nodeType="tmRoot"/>
+      </p:par>
+    </p:tnLst>
+  </p:timing>
 </p:sld>
 </file>
 
@@ -3599,7 +3619,7 @@
           <p:cNvPr id="2" name="Title 1">
             <a:extLst>
               <a:ext uri="{FF2B5EF4-FFF2-40B4-BE49-F238E27FC236}">
-                <a16:creationId xmlns:a16="http://schemas.microsoft.com/office/drawing/2014/main" id="{C883F8B2-C3AF-8D7C-2BD2-55FDD211721D}"/>
+                <a16:creationId xmlns:a16="http://schemas.microsoft.com/office/drawing/2014/main" xmlns="" id="{C883F8B2-C3AF-8D7C-2BD2-55FDD211721D}"/>
               </a:ext>
             </a:extLst>
           </p:cNvPr>
@@ -3644,7 +3664,7 @@
           <p:cNvPr id="3" name="Content Placeholder 2">
             <a:extLst>
               <a:ext uri="{FF2B5EF4-FFF2-40B4-BE49-F238E27FC236}">
-                <a16:creationId xmlns:a16="http://schemas.microsoft.com/office/drawing/2014/main" id="{DEE588A6-A04D-80A1-2CC5-5238C1367F70}"/>
+                <a16:creationId xmlns:a16="http://schemas.microsoft.com/office/drawing/2014/main" xmlns="" id="{DEE588A6-A04D-80A1-2CC5-5238C1367F70}"/>
               </a:ext>
             </a:extLst>
           </p:cNvPr>
@@ -3672,17 +3692,26 @@
           </a:p>
           <a:p>
             <a:r>
+              <a:rPr lang="en-IN" dirty="0" smtClean="0"/>
+              <a:t>w</a:t>
+            </a:r>
+            <a:r>
+              <a:rPr lang="en-IN" dirty="0" smtClean="0"/>
+              <a:t> </a:t>
+            </a:r>
+            <a:r>
               <a:rPr lang="en-IN" dirty="0"/>
-              <a:t>Window = </a:t>
+              <a:t>= </a:t>
             </a:r>
             <a:r>
               <a:rPr lang="en-IN" dirty="0" err="1"/>
               <a:t>tkinter.Tk</a:t>
             </a:r>
             <a:r>
-              <a:rPr lang="en-IN" dirty="0"/>
-              <a:t>()</a:t>
-            </a:r>
+              <a:rPr lang="en-IN" dirty="0" smtClean="0"/>
+              <a:t>() # create window</a:t>
+            </a:r>
+            <a:endParaRPr lang="en-IN" dirty="0"/>
           </a:p>
           <a:p>
             <a:r>
@@ -3750,6 +3779,13 @@
   <p:clrMapOvr>
     <a:masterClrMapping/>
   </p:clrMapOvr>
+  <p:timing>
+    <p:tnLst>
+      <p:par>
+        <p:cTn id="1" dur="indefinite" restart="never" nodeType="tmRoot"/>
+      </p:par>
+    </p:tnLst>
+  </p:timing>
 </p:sld>
 </file>
 
@@ -3772,10 +3808,335 @@
       </p:grpSpPr>
       <p:sp>
         <p:nvSpPr>
+          <p:cNvPr id="4" name="Rectangle 3"/>
+          <p:cNvSpPr/>
+          <p:nvPr/>
+        </p:nvSpPr>
+        <p:spPr>
+          <a:xfrm>
+            <a:off x="809469" y="-356651"/>
+            <a:ext cx="8334531" cy="7571303"/>
+          </a:xfrm>
+          <a:prstGeom prst="rect">
+            <a:avLst/>
+          </a:prstGeom>
+        </p:spPr>
+        <p:txBody>
+          <a:bodyPr wrap="square">
+            <a:spAutoFit/>
+          </a:bodyPr>
+          <a:lstStyle/>
+          <a:p>
+            <a:r>
+              <a:rPr lang="en-IN" dirty="0"/>
+              <a:t>import </a:t>
+            </a:r>
+            <a:r>
+              <a:rPr lang="en-IN" dirty="0" err="1"/>
+              <a:t>tkinter</a:t>
+            </a:r>
+            <a:r>
+              <a:rPr lang="en-IN" dirty="0"/>
+              <a:t> as </a:t>
+            </a:r>
+            <a:r>
+              <a:rPr lang="en-IN" dirty="0" err="1" smtClean="0"/>
+              <a:t>tk</a:t>
+            </a:r>
+            <a:endParaRPr lang="en-IN" dirty="0"/>
+          </a:p>
+          <a:p>
+            <a:r>
+              <a:rPr lang="en-IN" dirty="0" err="1"/>
+              <a:t>def</a:t>
+            </a:r>
+            <a:r>
+              <a:rPr lang="en-IN" dirty="0"/>
+              <a:t> </a:t>
+            </a:r>
+            <a:r>
+              <a:rPr lang="en-IN" dirty="0" err="1"/>
+              <a:t>OnClick</a:t>
+            </a:r>
+            <a:r>
+              <a:rPr lang="en-IN" dirty="0"/>
+              <a:t>():</a:t>
+            </a:r>
+          </a:p>
+          <a:p>
+            <a:r>
+              <a:rPr lang="en-IN" dirty="0"/>
+              <a:t>    no1 = txt1.get()</a:t>
+            </a:r>
+          </a:p>
+          <a:p>
+            <a:r>
+              <a:rPr lang="en-IN" dirty="0"/>
+              <a:t>    no2 = txt2.get()</a:t>
+            </a:r>
+          </a:p>
+          <a:p>
+            <a:r>
+              <a:rPr lang="en-IN" dirty="0"/>
+              <a:t>    lbl1.config(text = no1)</a:t>
+            </a:r>
+          </a:p>
+          <a:p>
+            <a:r>
+              <a:rPr lang="en-IN" dirty="0"/>
+              <a:t>    lbl2.config(text = no2)</a:t>
+            </a:r>
+          </a:p>
+          <a:p>
+            <a:r>
+              <a:rPr lang="en-IN" dirty="0"/>
+              <a:t>    </a:t>
+            </a:r>
+          </a:p>
+          <a:p>
+            <a:r>
+              <a:rPr lang="en-IN" dirty="0"/>
+              <a:t>w = </a:t>
+            </a:r>
+            <a:r>
+              <a:rPr lang="en-IN" dirty="0" err="1"/>
+              <a:t>tk.Tk</a:t>
+            </a:r>
+            <a:r>
+              <a:rPr lang="en-IN" dirty="0"/>
+              <a:t>()</a:t>
+            </a:r>
+          </a:p>
+          <a:p>
+            <a:r>
+              <a:rPr lang="en-IN" dirty="0" err="1"/>
+              <a:t>w.title</a:t>
+            </a:r>
+            <a:r>
+              <a:rPr lang="en-IN" dirty="0"/>
+              <a:t>('</a:t>
+            </a:r>
+            <a:r>
+              <a:rPr lang="en-IN" dirty="0" err="1"/>
+              <a:t>Calc</a:t>
+            </a:r>
+            <a:r>
+              <a:rPr lang="en-IN" dirty="0"/>
+              <a:t>')</a:t>
+            </a:r>
+          </a:p>
+          <a:p>
+            <a:r>
+              <a:rPr lang="en-IN" dirty="0" err="1"/>
+              <a:t>w.geometry</a:t>
+            </a:r>
+            <a:r>
+              <a:rPr lang="en-IN" dirty="0"/>
+              <a:t>('300x300')</a:t>
+            </a:r>
+          </a:p>
+          <a:p>
+            <a:endParaRPr lang="en-IN" dirty="0"/>
+          </a:p>
+          <a:p>
+            <a:r>
+              <a:rPr lang="en-IN" dirty="0"/>
+              <a:t>lbl1 = </a:t>
+            </a:r>
+            <a:r>
+              <a:rPr lang="en-IN" dirty="0" err="1"/>
+              <a:t>tk.Label</a:t>
+            </a:r>
+            <a:r>
+              <a:rPr lang="en-IN" dirty="0"/>
+              <a:t>(w, text="Enter No 1:", font = ('Arial', 12))</a:t>
+            </a:r>
+          </a:p>
+          <a:p>
+            <a:r>
+              <a:rPr lang="en-IN" dirty="0"/>
+              <a:t>lbl1.place(x=5,y=10)</a:t>
+            </a:r>
+          </a:p>
+          <a:p>
+            <a:endParaRPr lang="en-IN" dirty="0"/>
+          </a:p>
+          <a:p>
+            <a:r>
+              <a:rPr lang="en-IN" dirty="0"/>
+              <a:t>txt1 = </a:t>
+            </a:r>
+            <a:r>
+              <a:rPr lang="en-IN" dirty="0" err="1"/>
+              <a:t>tk.Entry</a:t>
+            </a:r>
+            <a:r>
+              <a:rPr lang="en-IN" dirty="0"/>
+              <a:t>(</a:t>
+            </a:r>
+            <a:r>
+              <a:rPr lang="en-IN" dirty="0" err="1"/>
+              <a:t>w,width</a:t>
+            </a:r>
+            <a:r>
+              <a:rPr lang="en-IN" dirty="0"/>
+              <a:t>=20)</a:t>
+            </a:r>
+          </a:p>
+          <a:p>
+            <a:r>
+              <a:rPr lang="en-IN" dirty="0"/>
+              <a:t>txt1.place(x=100, y=10)</a:t>
+            </a:r>
+          </a:p>
+          <a:p>
+            <a:endParaRPr lang="en-IN" dirty="0"/>
+          </a:p>
+          <a:p>
+            <a:r>
+              <a:rPr lang="en-IN" dirty="0"/>
+              <a:t>txt2 = </a:t>
+            </a:r>
+            <a:r>
+              <a:rPr lang="en-IN" dirty="0" err="1"/>
+              <a:t>tk.Entry</a:t>
+            </a:r>
+            <a:r>
+              <a:rPr lang="en-IN" dirty="0"/>
+              <a:t>(</a:t>
+            </a:r>
+            <a:r>
+              <a:rPr lang="en-IN" dirty="0" err="1"/>
+              <a:t>w,width</a:t>
+            </a:r>
+            <a:r>
+              <a:rPr lang="en-IN" dirty="0"/>
+              <a:t>=20)</a:t>
+            </a:r>
+          </a:p>
+          <a:p>
+            <a:r>
+              <a:rPr lang="en-IN" dirty="0"/>
+              <a:t>txt2.place(x=100, y=70)</a:t>
+            </a:r>
+          </a:p>
+          <a:p>
+            <a:endParaRPr lang="en-IN" dirty="0"/>
+          </a:p>
+          <a:p>
+            <a:r>
+              <a:rPr lang="en-IN" dirty="0"/>
+              <a:t>lbl2 = </a:t>
+            </a:r>
+            <a:r>
+              <a:rPr lang="en-IN" dirty="0" err="1"/>
+              <a:t>tk.Label</a:t>
+            </a:r>
+            <a:r>
+              <a:rPr lang="en-IN" dirty="0"/>
+              <a:t>(w, text="Enter No 2:", font = ('Arial', 12))</a:t>
+            </a:r>
+          </a:p>
+          <a:p>
+            <a:r>
+              <a:rPr lang="en-IN" dirty="0"/>
+              <a:t>lbl2.place(x=5,y=70)</a:t>
+            </a:r>
+          </a:p>
+          <a:p>
+            <a:endParaRPr lang="en-IN" dirty="0"/>
+          </a:p>
+          <a:p>
+            <a:r>
+              <a:rPr lang="en-IN" dirty="0" err="1"/>
+              <a:t>btn</a:t>
+            </a:r>
+            <a:r>
+              <a:rPr lang="en-IN" dirty="0"/>
+              <a:t> = </a:t>
+            </a:r>
+            <a:r>
+              <a:rPr lang="en-IN" dirty="0" err="1"/>
+              <a:t>tk.Button</a:t>
+            </a:r>
+            <a:r>
+              <a:rPr lang="en-IN" dirty="0"/>
+              <a:t>(w, text="Add Numbers", command=</a:t>
+            </a:r>
+            <a:r>
+              <a:rPr lang="en-IN" dirty="0" err="1"/>
+              <a:t>OnClick</a:t>
+            </a:r>
+            <a:r>
+              <a:rPr lang="en-IN" dirty="0"/>
+              <a:t>)</a:t>
+            </a:r>
+          </a:p>
+          <a:p>
+            <a:r>
+              <a:rPr lang="en-IN" dirty="0" err="1"/>
+              <a:t>btn.place</a:t>
+            </a:r>
+            <a:r>
+              <a:rPr lang="en-IN" dirty="0"/>
+              <a:t>(x=100, y=200)</a:t>
+            </a:r>
+          </a:p>
+          <a:p>
+            <a:r>
+              <a:rPr lang="en-IN" dirty="0" err="1"/>
+              <a:t>w.mainloop</a:t>
+            </a:r>
+            <a:r>
+              <a:rPr lang="en-IN" dirty="0"/>
+              <a:t>()</a:t>
+            </a:r>
+          </a:p>
+        </p:txBody>
+      </p:sp>
+    </p:spTree>
+    <p:extLst>
+      <p:ext uri="{BB962C8B-B14F-4D97-AF65-F5344CB8AC3E}">
+        <p14:creationId xmlns:p14="http://schemas.microsoft.com/office/powerpoint/2010/main" val="493464579"/>
+      </p:ext>
+    </p:extLst>
+  </p:cSld>
+  <p:clrMapOvr>
+    <a:masterClrMapping/>
+  </p:clrMapOvr>
+  <p:timing>
+    <p:tnLst>
+      <p:par>
+        <p:cTn id="1" dur="indefinite" restart="never" nodeType="tmRoot"/>
+      </p:par>
+    </p:tnLst>
+  </p:timing>
+</p:sld>
+</file>
+
+<file path=ppt/slides/slide5.xml><?xml version="1.0" encoding="utf-8"?>
+<p:sld xmlns:a="http://schemas.openxmlformats.org/drawingml/2006/main" xmlns:r="http://schemas.openxmlformats.org/officeDocument/2006/relationships" xmlns:p="http://schemas.openxmlformats.org/presentationml/2006/main">
+  <p:cSld>
+    <p:spTree>
+      <p:nvGrpSpPr>
+        <p:cNvPr id="1" name=""/>
+        <p:cNvGrpSpPr/>
+        <p:nvPr/>
+      </p:nvGrpSpPr>
+      <p:grpSpPr>
+        <a:xfrm>
+          <a:off x="0" y="0"/>
+          <a:ext cx="0" cy="0"/>
+          <a:chOff x="0" y="0"/>
+          <a:chExt cx="0" cy="0"/>
+        </a:xfrm>
+      </p:grpSpPr>
+      <p:sp>
+        <p:nvSpPr>
           <p:cNvPr id="2" name="Title 1">
             <a:extLst>
               <a:ext uri="{FF2B5EF4-FFF2-40B4-BE49-F238E27FC236}">
-                <a16:creationId xmlns:a16="http://schemas.microsoft.com/office/drawing/2014/main" id="{54977E65-6DEB-F253-5085-6AADDC1CE7D1}"/>
+                <a16:creationId xmlns:a16="http://schemas.microsoft.com/office/drawing/2014/main" xmlns="" id="{54977E65-6DEB-F253-5085-6AADDC1CE7D1}"/>
               </a:ext>
             </a:extLst>
           </p:cNvPr>
@@ -3817,7 +4178,7 @@
           <p:cNvPr id="4" name="Table 3">
             <a:extLst>
               <a:ext uri="{FF2B5EF4-FFF2-40B4-BE49-F238E27FC236}">
-                <a16:creationId xmlns:a16="http://schemas.microsoft.com/office/drawing/2014/main" id="{9833275F-CD03-3BEE-FE47-22F255C2EFB0}"/>
+                <a16:creationId xmlns:a16="http://schemas.microsoft.com/office/drawing/2014/main" xmlns="" id="{9833275F-CD03-3BEE-FE47-22F255C2EFB0}"/>
               </a:ext>
             </a:extLst>
           </p:cNvPr>
@@ -3844,14 +4205,14 @@
                 <a:gridCol w="1319134">
                   <a:extLst>
                     <a:ext uri="{9D8B030D-6E8A-4147-A177-3AD203B41FA5}">
-                      <a16:colId xmlns:a16="http://schemas.microsoft.com/office/drawing/2014/main" val="2011150652"/>
+                      <a16:colId xmlns:a16="http://schemas.microsoft.com/office/drawing/2014/main" xmlns="" val="2011150652"/>
                     </a:ext>
                   </a:extLst>
                 </a:gridCol>
                 <a:gridCol w="10872865">
                   <a:extLst>
                     <a:ext uri="{9D8B030D-6E8A-4147-A177-3AD203B41FA5}">
-                      <a16:colId xmlns:a16="http://schemas.microsoft.com/office/drawing/2014/main" val="2505196423"/>
+                      <a16:colId xmlns:a16="http://schemas.microsoft.com/office/drawing/2014/main" xmlns="" val="2505196423"/>
                     </a:ext>
                   </a:extLst>
                 </a:gridCol>
@@ -3979,7 +4340,7 @@
                 </a:tc>
                 <a:extLst>
                   <a:ext uri="{0D108BD9-81ED-4DB2-BD59-A6C34878D82A}">
-                    <a16:rowId xmlns:a16="http://schemas.microsoft.com/office/drawing/2014/main" val="3803643184"/>
+                    <a16:rowId xmlns:a16="http://schemas.microsoft.com/office/drawing/2014/main" xmlns="" val="3803643184"/>
                   </a:ext>
                 </a:extLst>
               </a:tr>
@@ -4106,7 +4467,7 @@
                 </a:tc>
                 <a:extLst>
                   <a:ext uri="{0D108BD9-81ED-4DB2-BD59-A6C34878D82A}">
-                    <a16:rowId xmlns:a16="http://schemas.microsoft.com/office/drawing/2014/main" val="3411544670"/>
+                    <a16:rowId xmlns:a16="http://schemas.microsoft.com/office/drawing/2014/main" xmlns="" val="3411544670"/>
                   </a:ext>
                 </a:extLst>
               </a:tr>
@@ -4233,7 +4594,7 @@
                 </a:tc>
                 <a:extLst>
                   <a:ext uri="{0D108BD9-81ED-4DB2-BD59-A6C34878D82A}">
-                    <a16:rowId xmlns:a16="http://schemas.microsoft.com/office/drawing/2014/main" val="1934666729"/>
+                    <a16:rowId xmlns:a16="http://schemas.microsoft.com/office/drawing/2014/main" xmlns="" val="1934666729"/>
                   </a:ext>
                 </a:extLst>
               </a:tr>
@@ -4370,7 +4731,7 @@
                 </a:tc>
                 <a:extLst>
                   <a:ext uri="{0D108BD9-81ED-4DB2-BD59-A6C34878D82A}">
-                    <a16:rowId xmlns:a16="http://schemas.microsoft.com/office/drawing/2014/main" val="1770797289"/>
+                    <a16:rowId xmlns:a16="http://schemas.microsoft.com/office/drawing/2014/main" xmlns="" val="1770797289"/>
                   </a:ext>
                 </a:extLst>
               </a:tr>
@@ -4497,7 +4858,7 @@
                 </a:tc>
                 <a:extLst>
                   <a:ext uri="{0D108BD9-81ED-4DB2-BD59-A6C34878D82A}">
-                    <a16:rowId xmlns:a16="http://schemas.microsoft.com/office/drawing/2014/main" val="3745740861"/>
+                    <a16:rowId xmlns:a16="http://schemas.microsoft.com/office/drawing/2014/main" xmlns="" val="3745740861"/>
                   </a:ext>
                 </a:extLst>
               </a:tr>
@@ -4624,7 +4985,7 @@
                 </a:tc>
                 <a:extLst>
                   <a:ext uri="{0D108BD9-81ED-4DB2-BD59-A6C34878D82A}">
-                    <a16:rowId xmlns:a16="http://schemas.microsoft.com/office/drawing/2014/main" val="1187001626"/>
+                    <a16:rowId xmlns:a16="http://schemas.microsoft.com/office/drawing/2014/main" xmlns="" val="1187001626"/>
                   </a:ext>
                 </a:extLst>
               </a:tr>
@@ -4751,7 +5112,7 @@
                 </a:tc>
                 <a:extLst>
                   <a:ext uri="{0D108BD9-81ED-4DB2-BD59-A6C34878D82A}">
-                    <a16:rowId xmlns:a16="http://schemas.microsoft.com/office/drawing/2014/main" val="3400152957"/>
+                    <a16:rowId xmlns:a16="http://schemas.microsoft.com/office/drawing/2014/main" xmlns="" val="3400152957"/>
                   </a:ext>
                 </a:extLst>
               </a:tr>
@@ -4878,7 +5239,7 @@
                 </a:tc>
                 <a:extLst>
                   <a:ext uri="{0D108BD9-81ED-4DB2-BD59-A6C34878D82A}">
-                    <a16:rowId xmlns:a16="http://schemas.microsoft.com/office/drawing/2014/main" val="3080092361"/>
+                    <a16:rowId xmlns:a16="http://schemas.microsoft.com/office/drawing/2014/main" xmlns="" val="3080092361"/>
                   </a:ext>
                 </a:extLst>
               </a:tr>
@@ -5005,7 +5366,7 @@
                 </a:tc>
                 <a:extLst>
                   <a:ext uri="{0D108BD9-81ED-4DB2-BD59-A6C34878D82A}">
-                    <a16:rowId xmlns:a16="http://schemas.microsoft.com/office/drawing/2014/main" val="334137243"/>
+                    <a16:rowId xmlns:a16="http://schemas.microsoft.com/office/drawing/2014/main" xmlns="" val="334137243"/>
                   </a:ext>
                 </a:extLst>
               </a:tr>
@@ -5132,7 +5493,7 @@
                 </a:tc>
                 <a:extLst>
                   <a:ext uri="{0D108BD9-81ED-4DB2-BD59-A6C34878D82A}">
-                    <a16:rowId xmlns:a16="http://schemas.microsoft.com/office/drawing/2014/main" val="2391160376"/>
+                    <a16:rowId xmlns:a16="http://schemas.microsoft.com/office/drawing/2014/main" xmlns="" val="2391160376"/>
                   </a:ext>
                 </a:extLst>
               </a:tr>
@@ -5259,7 +5620,7 @@
                 </a:tc>
                 <a:extLst>
                   <a:ext uri="{0D108BD9-81ED-4DB2-BD59-A6C34878D82A}">
-                    <a16:rowId xmlns:a16="http://schemas.microsoft.com/office/drawing/2014/main" val="2963308074"/>
+                    <a16:rowId xmlns:a16="http://schemas.microsoft.com/office/drawing/2014/main" xmlns="" val="2963308074"/>
                   </a:ext>
                 </a:extLst>
               </a:tr>
@@ -5386,7 +5747,7 @@
                 </a:tc>
                 <a:extLst>
                   <a:ext uri="{0D108BD9-81ED-4DB2-BD59-A6C34878D82A}">
-                    <a16:rowId xmlns:a16="http://schemas.microsoft.com/office/drawing/2014/main" val="926601045"/>
+                    <a16:rowId xmlns:a16="http://schemas.microsoft.com/office/drawing/2014/main" xmlns="" val="926601045"/>
                   </a:ext>
                 </a:extLst>
               </a:tr>
@@ -5513,7 +5874,7 @@
                 </a:tc>
                 <a:extLst>
                   <a:ext uri="{0D108BD9-81ED-4DB2-BD59-A6C34878D82A}">
-                    <a16:rowId xmlns:a16="http://schemas.microsoft.com/office/drawing/2014/main" val="645611308"/>
+                    <a16:rowId xmlns:a16="http://schemas.microsoft.com/office/drawing/2014/main" xmlns="" val="645611308"/>
                   </a:ext>
                 </a:extLst>
               </a:tr>
@@ -5640,7 +6001,7 @@
                 </a:tc>
                 <a:extLst>
                   <a:ext uri="{0D108BD9-81ED-4DB2-BD59-A6C34878D82A}">
-                    <a16:rowId xmlns:a16="http://schemas.microsoft.com/office/drawing/2014/main" val="913605996"/>
+                    <a16:rowId xmlns:a16="http://schemas.microsoft.com/office/drawing/2014/main" xmlns="" val="913605996"/>
                   </a:ext>
                 </a:extLst>
               </a:tr>
@@ -5767,7 +6128,7 @@
                 </a:tc>
                 <a:extLst>
                   <a:ext uri="{0D108BD9-81ED-4DB2-BD59-A6C34878D82A}">
-                    <a16:rowId xmlns:a16="http://schemas.microsoft.com/office/drawing/2014/main" val="4290252408"/>
+                    <a16:rowId xmlns:a16="http://schemas.microsoft.com/office/drawing/2014/main" xmlns="" val="4290252408"/>
                   </a:ext>
                 </a:extLst>
               </a:tr>
@@ -5894,7 +6255,7 @@
                 </a:tc>
                 <a:extLst>
                   <a:ext uri="{0D108BD9-81ED-4DB2-BD59-A6C34878D82A}">
-                    <a16:rowId xmlns:a16="http://schemas.microsoft.com/office/drawing/2014/main" val="2788064730"/>
+                    <a16:rowId xmlns:a16="http://schemas.microsoft.com/office/drawing/2014/main" xmlns="" val="2788064730"/>
                   </a:ext>
                 </a:extLst>
               </a:tr>
@@ -6021,7 +6382,7 @@
                 </a:tc>
                 <a:extLst>
                   <a:ext uri="{0D108BD9-81ED-4DB2-BD59-A6C34878D82A}">
-                    <a16:rowId xmlns:a16="http://schemas.microsoft.com/office/drawing/2014/main" val="3590642008"/>
+                    <a16:rowId xmlns:a16="http://schemas.microsoft.com/office/drawing/2014/main" xmlns="" val="3590642008"/>
                   </a:ext>
                 </a:extLst>
               </a:tr>
@@ -6148,7 +6509,7 @@
                 </a:tc>
                 <a:extLst>
                   <a:ext uri="{0D108BD9-81ED-4DB2-BD59-A6C34878D82A}">
-                    <a16:rowId xmlns:a16="http://schemas.microsoft.com/office/drawing/2014/main" val="3316105177"/>
+                    <a16:rowId xmlns:a16="http://schemas.microsoft.com/office/drawing/2014/main" xmlns="" val="3316105177"/>
                   </a:ext>
                 </a:extLst>
               </a:tr>
@@ -6285,7 +6646,7 @@
                 </a:tc>
                 <a:extLst>
                   <a:ext uri="{0D108BD9-81ED-4DB2-BD59-A6C34878D82A}">
-                    <a16:rowId xmlns:a16="http://schemas.microsoft.com/office/drawing/2014/main" val="4250724888"/>
+                    <a16:rowId xmlns:a16="http://schemas.microsoft.com/office/drawing/2014/main" xmlns="" val="4250724888"/>
                   </a:ext>
                 </a:extLst>
               </a:tr>
@@ -6303,10 +6664,17 @@
   <p:clrMapOvr>
     <a:masterClrMapping/>
   </p:clrMapOvr>
+  <p:timing>
+    <p:tnLst>
+      <p:par>
+        <p:cTn id="1" dur="indefinite" restart="never" nodeType="tmRoot"/>
+      </p:par>
+    </p:tnLst>
+  </p:timing>
 </p:sld>
 </file>
 
-<file path=ppt/slides/slide5.xml><?xml version="1.0" encoding="utf-8"?>
+<file path=ppt/slides/slide6.xml><?xml version="1.0" encoding="utf-8"?>
 <p:sld xmlns:a="http://schemas.openxmlformats.org/drawingml/2006/main" xmlns:r="http://schemas.openxmlformats.org/officeDocument/2006/relationships" xmlns:p="http://schemas.openxmlformats.org/presentationml/2006/main">
   <p:cSld>
     <p:spTree>
@@ -6328,7 +6696,7 @@
           <p:cNvPr id="2" name="Title 1">
             <a:extLst>
               <a:ext uri="{FF2B5EF4-FFF2-40B4-BE49-F238E27FC236}">
-                <a16:creationId xmlns:a16="http://schemas.microsoft.com/office/drawing/2014/main" id="{314B343E-96F6-A989-A56F-92072943C85E}"/>
+                <a16:creationId xmlns:a16="http://schemas.microsoft.com/office/drawing/2014/main" xmlns="" id="{314B343E-96F6-A989-A56F-92072943C85E}"/>
               </a:ext>
             </a:extLst>
           </p:cNvPr>
@@ -6356,7 +6724,7 @@
           <p:cNvPr id="3" name="Content Placeholder 2">
             <a:extLst>
               <a:ext uri="{FF2B5EF4-FFF2-40B4-BE49-F238E27FC236}">
-                <a16:creationId xmlns:a16="http://schemas.microsoft.com/office/drawing/2014/main" id="{E1B5EF2A-07AF-3DF8-67C7-B2ABAC251B34}"/>
+                <a16:creationId xmlns:a16="http://schemas.microsoft.com/office/drawing/2014/main" xmlns="" id="{E1B5EF2A-07AF-3DF8-67C7-B2ABAC251B34}"/>
               </a:ext>
             </a:extLst>
           </p:cNvPr>
@@ -6424,6 +6792,13 @@
   <p:clrMapOvr>
     <a:masterClrMapping/>
   </p:clrMapOvr>
+  <p:timing>
+    <p:tnLst>
+      <p:par>
+        <p:cTn id="1" dur="indefinite" restart="never" nodeType="tmRoot"/>
+      </p:par>
+    </p:tnLst>
+  </p:timing>
 </p:sld>
 </file>
 
